--- a/curriculum-planner/output/slides/session_02_slides.pptx
+++ b/curriculum-planner/output/slides/session_02_slides.pptx
@@ -23,6 +23,8 @@
     <p:sldId id="271" r:id="rId22"/>
     <p:sldId id="272" r:id="rId23"/>
     <p:sldId id="273" r:id="rId24"/>
+    <p:sldId id="274" r:id="rId25"/>
+    <p:sldId id="275" r:id="rId26"/>
   </p:sldIdLst>
   <p:sldSz cx="12191695" cy="6858000" type="screen4x3"/>
   <p:notesSz cx="6858000" cy="9144000"/>
@@ -3177,7 +3179,7 @@
           <a:lstStyle/>
           <a:p>
             <a:r>
-              <a:t>Activity: Pacing: Design principles =. Examples (good vs. bad dashboards) =. Interaction: rewrite one headline on own dashboard =. Operational vs. strategic =. Transition =.</a:t>
+              <a:t>Activity: Lunch</a:t>
             </a:r>
           </a:p>
         </p:txBody>
@@ -3198,7 +3200,7 @@
           <a:lstStyle/>
           <a:p>
             <a:r>
-              <a:t>Duration: 10 min</a:t>
+              <a:t>Duration: 60 min</a:t>
             </a:r>
           </a:p>
           <a:p>
@@ -3242,7 +3244,7 @@
           <a:lstStyle/>
           <a:p>
             <a:r>
-              <a:t>Activity: Build Your Dashboard</a:t>
+              <a:t>Activity: Data Storytelling: The Narrative Arc</a:t>
             </a:r>
           </a:p>
         </p:txBody>
@@ -3263,7 +3265,7 @@
           <a:lstStyle/>
           <a:p>
             <a:r>
-              <a:t>Duration: 40 min</a:t>
+              <a:t>Duration: 30 min</a:t>
             </a:r>
           </a:p>
           <a:p>
@@ -3274,31 +3276,13 @@
           <a:p>
             <a:pPr lvl="1"/>
             <a:r>
-              <a:t>Format: Individual, hands-on</a:t>
-            </a:r>
-          </a:p>
-          <a:p>
-            <a:pPr lvl="1"/>
-            <a:r>
-              <a:t>Bloom’s: Create Delivery: Complete dashboard from…</a:t>
-            </a:r>
-          </a:p>
-          <a:p>
-            <a:pPr lvl="1"/>
-            <a:r>
-              <a:t>Minimum 4 visualizations, 1 filter, clear…</a:t>
-            </a:r>
-          </a:p>
-          <a:p>
-            <a:pPr lvl="1"/>
-            <a:r>
-              <a:t>Focus: clarity over complexity</a:t>
-            </a:r>
-          </a:p>
-          <a:p>
-            <a:pPr lvl="1"/>
-            <a:r>
-              <a:t>A simple dashboard answering a real…</a:t>
+              <a:t>Format: Interactive lecture + individual outlining</a:t>
+            </a:r>
+          </a:p>
+          <a:p>
+            <a:pPr lvl="1"/>
+            <a:r>
+              <a:t>Bloom’s: Analyze + Create</a:t>
             </a:r>
           </a:p>
         </p:txBody>
@@ -3337,7 +3321,7 @@
           <a:lstStyle/>
           <a:p>
             <a:r>
-              <a:t>Activity: Pacing: Build =. Save + prepare for gallery walk =.</a:t>
+              <a:t>Activity: “Explain It Like I’m the CEO”</a:t>
             </a:r>
           </a:p>
         </p:txBody>
@@ -3358,12 +3342,42 @@
           <a:lstStyle/>
           <a:p>
             <a:r>
-              <a:t>Duration: 35 min</a:t>
+              <a:t>Duration: 30 min</a:t>
             </a:r>
           </a:p>
           <a:p>
             <a:r>
               <a:t>Format: Whole Class</a:t>
+            </a:r>
+          </a:p>
+          <a:p>
+            <a:pPr lvl="1"/>
+            <a:r>
+              <a:t>Format: Pairs, role-play</a:t>
+            </a:r>
+          </a:p>
+          <a:p>
+            <a:pPr lvl="1"/>
+            <a:r>
+              <a:t>Bloom’s: Apply + Evaluate Delivery: Present…</a:t>
+            </a:r>
+          </a:p>
+          <a:p>
+            <a:pPr lvl="1"/>
+            <a:r>
+              <a:t>” Adapt: cut detail, lead with…</a:t>
+            </a:r>
+          </a:p>
+          <a:p>
+            <a:pPr lvl="1"/>
+            <a:r>
+              <a:t>Switch roles</a:t>
+            </a:r>
+          </a:p>
+          <a:p>
+            <a:pPr lvl="1"/>
+            <a:r>
+              <a:t>Debrief: What got cut? What survived?…</a:t>
             </a:r>
           </a:p>
         </p:txBody>
@@ -3402,7 +3416,7 @@
           <a:lstStyle/>
           <a:p>
             <a:r>
-              <a:t>Activity: Dashboard Gallery Walk + 5-Second Test  |✆</a:t>
+              <a:t>Activity: Break</a:t>
             </a:r>
           </a:p>
         </p:txBody>
@@ -3423,7 +3437,7 @@
           <a:lstStyle/>
           <a:p>
             <a:r>
-              <a:t>Duration: 20 min</a:t>
+              <a:t>Duration: 15 min</a:t>
             </a:r>
           </a:p>
           <a:p>
@@ -3467,7 +3481,7 @@
           <a:lstStyle/>
           <a:p>
             <a:r>
-              <a:t>Activity: Pacing: Setup + explain rotation =. 5 stations × 3.= 17.. Transition to lunch = 0..</a:t>
+              <a:t>Activity: The Data-Driven Memo</a:t>
             </a:r>
           </a:p>
         </p:txBody>
@@ -3488,12 +3502,42 @@
           <a:lstStyle/>
           <a:p>
             <a:r>
-              <a:t>Duration: 2 min</a:t>
+              <a:t>Duration: 40 min</a:t>
             </a:r>
           </a:p>
           <a:p>
             <a:r>
               <a:t>Format: Whole Class</a:t>
+            </a:r>
+          </a:p>
+          <a:p>
+            <a:pPr lvl="1"/>
+            <a:r>
+              <a:t>Format: Mini-lecture + individual writing</a:t>
+            </a:r>
+          </a:p>
+          <a:p>
+            <a:pPr lvl="1"/>
+            <a:r>
+              <a:t>Bloom’s: Create Delivery: One-line recommendation at…</a:t>
+            </a:r>
+          </a:p>
+          <a:p>
+            <a:pPr lvl="1"/>
+            <a:r>
+              <a:t>3–4 supporting data points with charts</a:t>
+            </a:r>
+          </a:p>
+          <a:p>
+            <a:pPr lvl="1"/>
+            <a:r>
+              <a:t>Risks and limitations</a:t>
+            </a:r>
+          </a:p>
+          <a:p>
+            <a:pPr lvl="1"/>
+            <a:r>
+              <a:t>Next steps</a:t>
             </a:r>
           </a:p>
         </p:txBody>
@@ -3532,7 +3576,7 @@
           <a:lstStyle/>
           <a:p>
             <a:r>
-              <a:t>Activity: Lunch</a:t>
+              <a:t>Activity: Data Fallacy Spotter</a:t>
             </a:r>
           </a:p>
         </p:txBody>
@@ -3553,12 +3597,42 @@
           <a:lstStyle/>
           <a:p>
             <a:r>
-              <a:t>Duration: 60 min</a:t>
+              <a:t>Duration: 15 min</a:t>
             </a:r>
           </a:p>
           <a:p>
             <a:r>
               <a:t>Format: Whole Class</a:t>
+            </a:r>
+          </a:p>
+          <a:p>
+            <a:pPr lvl="1"/>
+            <a:r>
+              <a:t>Format: Full group, rapid exercise</a:t>
+            </a:r>
+          </a:p>
+          <a:p>
+            <a:pPr lvl="1"/>
+            <a:r>
+              <a:t>Bloom’s: Evaluate Delivery: Beyond correlation/causation: survivorship…</a:t>
+            </a:r>
+          </a:p>
+          <a:p>
+            <a:pPr lvl="1"/>
+            <a:r>
+              <a:t>5 examples, students identify the fallacy</a:t>
+            </a:r>
+          </a:p>
+          <a:p>
+            <a:pPr lvl="1"/>
+            <a:r>
+              <a:t>Fast-paced</a:t>
+            </a:r>
+          </a:p>
+          <a:p>
+            <a:pPr lvl="1"/>
+            <a:r>
+              <a:t>The critical thinking that separates data…</a:t>
             </a:r>
           </a:p>
         </p:txBody>
@@ -3597,7 +3671,7 @@
           <a:lstStyle/>
           <a:p>
             <a:r>
-              <a:t>Activity: Data Storytelling: The Narrative Arc</a:t>
+              <a:t>Activity: Correlation vs. Causation Workshop</a:t>
             </a:r>
           </a:p>
         </p:txBody>
@@ -3629,13 +3703,19 @@
           <a:p>
             <a:pPr lvl="1"/>
             <a:r>
-              <a:t>Format: Interactive lecture + individual outlining</a:t>
-            </a:r>
-          </a:p>
-          <a:p>
-            <a:pPr lvl="1"/>
-            <a:r>
-              <a:t>Bloom’s: Analyze + Create</a:t>
+              <a:t>Format: Group exercise</a:t>
+            </a:r>
+          </a:p>
+          <a:p>
+            <a:pPr lvl="1"/>
+            <a:r>
+              <a:t>Bloom’s: Evaluate Delivery: 5 spurious correlations…</a:t>
+            </a:r>
+          </a:p>
+          <a:p>
+            <a:pPr lvl="1"/>
+            <a:r>
+              <a:t>Students analyze 3 claims from their…</a:t>
             </a:r>
           </a:p>
         </p:txBody>
@@ -3674,7 +3754,7 @@
           <a:lstStyle/>
           <a:p>
             <a:r>
-              <a:t>Check for Understanding</a:t>
+              <a:t>Activity: GDPR &amp; Data Privacy Basics</a:t>
             </a:r>
           </a:p>
         </p:txBody>
@@ -3695,12 +3775,30 @@
           <a:lstStyle/>
           <a:p>
             <a:r>
-              <a:t>Technique: Think-Pair-Share</a:t>
-            </a:r>
-          </a:p>
-          <a:p>
-            <a:r>
-              <a:t>Can you demonstrate: Session 2 Contribution?</a:t>
+              <a:t>Duration: 20 min</a:t>
+            </a:r>
+          </a:p>
+          <a:p>
+            <a:r>
+              <a:t>Format: Whole Class</a:t>
+            </a:r>
+          </a:p>
+          <a:p>
+            <a:pPr lvl="1"/>
+            <a:r>
+              <a:t>Format: Interactive lecture</a:t>
+            </a:r>
+          </a:p>
+          <a:p>
+            <a:pPr lvl="1"/>
+            <a:r>
+              <a:t>Bloom’s: Understand Delivery: What GDPR means…</a:t>
+            </a:r>
+          </a:p>
+          <a:p>
+            <a:pPr lvl="1"/>
+            <a:r>
+              <a:t>What can you share? What must…</a:t>
             </a:r>
           </a:p>
         </p:txBody>
@@ -3739,7 +3837,7 @@
           <a:lstStyle/>
           <a:p>
             <a:r>
-              <a:t>Summary &amp; Closing</a:t>
+              <a:t>Activity: Day 2 Wrap + Mid-Week Assignment</a:t>
             </a:r>
           </a:p>
         </p:txBody>
@@ -3760,19 +3858,77 @@
           <a:lstStyle/>
           <a:p>
             <a:r>
-              <a:t>Review key takeaways</a:t>
-            </a:r>
-          </a:p>
-          <a:p>
-            <a:pPr/>
-            <a:r>
-              <a:t>Complete exit ticket</a:t>
-            </a:r>
-          </a:p>
-          <a:p>
-            <a:pPr/>
-            <a:r>
-              <a:t>Preview next session</a:t>
+              <a:t>Duration: 35 min</a:t>
+            </a:r>
+          </a:p>
+          <a:p>
+            <a:r>
+              <a:t>Format: Whole Class</a:t>
+            </a:r>
+          </a:p>
+        </p:txBody>
+      </p:sp>
+    </p:spTree>
+  </p:cSld>
+  <p:clrMapOvr>
+    <a:masterClrMapping/>
+  </p:clrMapOvr>
+</p:sld>
+</file>
+
+<file path=ppt/slides/slide19.xml><?xml version="1.0" encoding="utf-8"?>
+<p:sld xmlns:a="http://schemas.openxmlformats.org/drawingml/2006/main" xmlns:p="http://schemas.openxmlformats.org/presentationml/2006/main" xmlns:r="http://schemas.openxmlformats.org/officeDocument/2006/relationships">
+  <p:cSld>
+    <p:spTree>
+      <p:nvGrpSpPr>
+        <p:cNvPr id="1" name=""/>
+        <p:cNvGrpSpPr/>
+        <p:nvPr/>
+      </p:nvGrpSpPr>
+      <p:grpSpPr/>
+      <p:sp>
+        <p:nvSpPr>
+          <p:cNvPr id="2" name="Title 1"/>
+          <p:cNvSpPr>
+            <a:spLocks noGrp="1"/>
+          </p:cNvSpPr>
+          <p:nvPr>
+            <p:ph type="title"/>
+          </p:nvPr>
+        </p:nvSpPr>
+        <p:spPr/>
+        <p:txBody>
+          <a:bodyPr/>
+          <a:lstStyle/>
+          <a:p>
+            <a:r>
+              <a:t>Check for Understanding</a:t>
+            </a:r>
+          </a:p>
+        </p:txBody>
+      </p:sp>
+      <p:sp>
+        <p:nvSpPr>
+          <p:cNvPr id="3" name="Content Placeholder 2"/>
+          <p:cNvSpPr>
+            <a:spLocks noGrp="1"/>
+          </p:cNvSpPr>
+          <p:nvPr>
+            <p:ph idx="1"/>
+          </p:nvPr>
+        </p:nvSpPr>
+        <p:spPr/>
+        <p:txBody>
+          <a:bodyPr/>
+          <a:lstStyle/>
+          <a:p>
+            <a:r>
+              <a:t>Technique: Think-Pair-Share</a:t>
+            </a:r>
+          </a:p>
+          <a:p>
+            <a:r>
+              <a:t>Can you demonstrate: Use VLOOKUP, INDEX-MATCH, and conditional formatting for analytical questions (LO #2)?</a:t>
             </a:r>
           </a:p>
         </p:txBody>
@@ -3832,37 +3988,109 @@
           <a:lstStyle/>
           <a:p>
             <a:r>
-              <a:t>SWBAT: Session 2 Contribution</a:t>
+              <a:t>SWBAT: Use VLOOKUP, INDEX-MATCH, and conditional…</a:t>
             </a:r>
           </a:p>
           <a:p>
             <a:pPr/>
             <a:r>
-              <a:t>SWBAT: By the end of Session…</a:t>
+              <a:t>SWBAT: Build an interactive dashboard in…</a:t>
             </a:r>
           </a:p>
           <a:p>
             <a:pPr/>
             <a:r>
-              <a:t>SWBAT: Use VLOOKUP, INDEX-MATCH, and conditional…</a:t>
+              <a:t>SWBAT: Tell a data story using…</a:t>
             </a:r>
           </a:p>
           <a:p>
             <a:pPr/>
             <a:r>
-              <a:t>SWBAT: Build an interactive dashboard in…</a:t>
+              <a:t>SWBAT: Write a 1-page data-driven memo…</a:t>
             </a:r>
           </a:p>
           <a:p>
             <a:pPr/>
             <a:r>
-              <a:t>SWBAT: Tell a data story using…</a:t>
+              <a:t>SWBAT: Identify 5 common data fallacies…</a:t>
             </a:r>
           </a:p>
           <a:p>
             <a:pPr/>
             <a:r>
-              <a:t>SWBAT: Write a 1-page data-driven memo…</a:t>
+              <a:t>SWBAT: Explain basic GDPR principles relevant…</a:t>
+            </a:r>
+          </a:p>
+        </p:txBody>
+      </p:sp>
+    </p:spTree>
+  </p:cSld>
+  <p:clrMapOvr>
+    <a:masterClrMapping/>
+  </p:clrMapOvr>
+</p:sld>
+</file>
+
+<file path=ppt/slides/slide20.xml><?xml version="1.0" encoding="utf-8"?>
+<p:sld xmlns:a="http://schemas.openxmlformats.org/drawingml/2006/main" xmlns:p="http://schemas.openxmlformats.org/presentationml/2006/main" xmlns:r="http://schemas.openxmlformats.org/officeDocument/2006/relationships">
+  <p:cSld>
+    <p:spTree>
+      <p:nvGrpSpPr>
+        <p:cNvPr id="1" name=""/>
+        <p:cNvGrpSpPr/>
+        <p:nvPr/>
+      </p:nvGrpSpPr>
+      <p:grpSpPr/>
+      <p:sp>
+        <p:nvSpPr>
+          <p:cNvPr id="2" name="Title 1"/>
+          <p:cNvSpPr>
+            <a:spLocks noGrp="1"/>
+          </p:cNvSpPr>
+          <p:nvPr>
+            <p:ph type="title"/>
+          </p:nvPr>
+        </p:nvSpPr>
+        <p:spPr/>
+        <p:txBody>
+          <a:bodyPr/>
+          <a:lstStyle/>
+          <a:p>
+            <a:r>
+              <a:t>Summary &amp; Closing</a:t>
+            </a:r>
+          </a:p>
+        </p:txBody>
+      </p:sp>
+      <p:sp>
+        <p:nvSpPr>
+          <p:cNvPr id="3" name="Content Placeholder 2"/>
+          <p:cNvSpPr>
+            <a:spLocks noGrp="1"/>
+          </p:cNvSpPr>
+          <p:nvPr>
+            <p:ph idx="1"/>
+          </p:nvPr>
+        </p:nvSpPr>
+        <p:spPr/>
+        <p:txBody>
+          <a:bodyPr/>
+          <a:lstStyle/>
+          <a:p>
+            <a:r>
+              <a:t>Review key takeaways</a:t>
+            </a:r>
+          </a:p>
+          <a:p>
+            <a:pPr/>
+            <a:r>
+              <a:t>Complete exit ticket</a:t>
+            </a:r>
+          </a:p>
+          <a:p>
+            <a:pPr/>
+            <a:r>
+              <a:t>Preview next session</a:t>
             </a:r>
           </a:p>
         </p:txBody>
@@ -4085,7 +4313,7 @@
           <a:lstStyle/>
           <a:p>
             <a:r>
-              <a:t>Activity: Pacing: VLOOKUP (teach with diagram + follow along) =. INDEX-MATCH (teach as upgrade + practice) =. Conditional formatting =. Troubleshooting buffer =.</a:t>
+              <a:t>Activity: From Spreadsheet to Dashboard  |✆</a:t>
             </a:r>
           </a:p>
         </p:txBody>
@@ -4106,12 +4334,42 @@
           <a:lstStyle/>
           <a:p>
             <a:r>
-              <a:t>Duration: 12 min</a:t>
-            </a:r>
-          </a:p>
-          <a:p>
-            <a:r>
-              <a:t>Format: Guided Practice</a:t>
+              <a:t>Duration: 40 min</a:t>
+            </a:r>
+          </a:p>
+          <a:p>
+            <a:r>
+              <a:t>Format: Whole Class</a:t>
+            </a:r>
+          </a:p>
+          <a:p>
+            <a:pPr lvl="1"/>
+            <a:r>
+              <a:t>Format: Instructor-led demo + guided follow-along</a:t>
+            </a:r>
+          </a:p>
+          <a:p>
+            <a:pPr lvl="1"/>
+            <a:r>
+              <a:t>Bloom’s: Apply Delivery: Part 1 (12…</a:t>
+            </a:r>
+          </a:p>
+          <a:p>
+            <a:pPr lvl="1"/>
+            <a:r>
+              <a:t>Everyone opens Looker Studio</a:t>
+            </a:r>
+          </a:p>
+          <a:p>
+            <a:pPr lvl="1"/>
+            <a:r>
+              <a:t>Tour the interface: data sources panel,…</a:t>
+            </a:r>
+          </a:p>
+          <a:p>
+            <a:pPr lvl="1"/>
+            <a:r>
+              <a:t>This is pure orientation—no building yet</a:t>
             </a:r>
           </a:p>
         </p:txBody>
@@ -4150,7 +4408,7 @@
           <a:lstStyle/>
           <a:p>
             <a:r>
-              <a:t>Activity: From Spreadsheet to Dashboard  |✆</a:t>
+              <a:t>Activity: Break</a:t>
             </a:r>
           </a:p>
         </p:txBody>
@@ -4171,42 +4429,12 @@
           <a:lstStyle/>
           <a:p>
             <a:r>
-              <a:t>Duration: 40 min</a:t>
+              <a:t>Duration: 15 min</a:t>
             </a:r>
           </a:p>
           <a:p>
             <a:r>
               <a:t>Format: Whole Class</a:t>
-            </a:r>
-          </a:p>
-          <a:p>
-            <a:pPr lvl="1"/>
-            <a:r>
-              <a:t>Format: Instructor-led demo + guided follow-along</a:t>
-            </a:r>
-          </a:p>
-          <a:p>
-            <a:pPr lvl="1"/>
-            <a:r>
-              <a:t>Bloom’s: Apply Delivery: Part 1 (12…</a:t>
-            </a:r>
-          </a:p>
-          <a:p>
-            <a:pPr lvl="1"/>
-            <a:r>
-              <a:t>Everyone opens Looker Studio</a:t>
-            </a:r>
-          </a:p>
-          <a:p>
-            <a:pPr lvl="1"/>
-            <a:r>
-              <a:t>Tour the interface: data sources panel,…</a:t>
-            </a:r>
-          </a:p>
-          <a:p>
-            <a:pPr lvl="1"/>
-            <a:r>
-              <a:t>This is pure orientation—no building yet</a:t>
             </a:r>
           </a:p>
         </p:txBody>
@@ -4245,7 +4473,7 @@
           <a:lstStyle/>
           <a:p>
             <a:r>
-              <a:t>Activity: Pacing: Interface orientation =. Guided build =. Save + verify =.</a:t>
+              <a:t>Activity: Dashboard Design Principles</a:t>
             </a:r>
           </a:p>
         </p:txBody>
@@ -4266,12 +4494,42 @@
           <a:lstStyle/>
           <a:p>
             <a:r>
-              <a:t>Duration: 12 min</a:t>
+              <a:t>Duration: 25 min</a:t>
             </a:r>
           </a:p>
           <a:p>
             <a:r>
               <a:t>Format: Whole Class</a:t>
+            </a:r>
+          </a:p>
+          <a:p>
+            <a:pPr lvl="1"/>
+            <a:r>
+              <a:t>Format: Interactive lecture</a:t>
+            </a:r>
+          </a:p>
+          <a:p>
+            <a:pPr lvl="1"/>
+            <a:r>
+              <a:t>Bloom’s: Understand + Evaluate Delivery: The…</a:t>
+            </a:r>
+          </a:p>
+          <a:p>
+            <a:pPr lvl="1"/>
+            <a:r>
+              <a:t>Operational dashboards (daily monitoring) vs</a:t>
+            </a:r>
+          </a:p>
+          <a:p>
+            <a:pPr lvl="1"/>
+            <a:r>
+              <a:t>strategic dashboards (quarterly insight)</a:t>
+            </a:r>
+          </a:p>
+          <a:p>
+            <a:pPr lvl="1"/>
+            <a:r>
+              <a:t>Insert interaction at midpoint: students look…</a:t>
             </a:r>
           </a:p>
         </p:txBody>
@@ -4310,7 +4568,7 @@
           <a:lstStyle/>
           <a:p>
             <a:r>
-              <a:t>Activity: Break</a:t>
+              <a:t>Activity: Build Your Dashboard</a:t>
             </a:r>
           </a:p>
         </p:txBody>
@@ -4331,12 +4589,42 @@
           <a:lstStyle/>
           <a:p>
             <a:r>
-              <a:t>Duration: 15 min</a:t>
+              <a:t>Duration: 40 min</a:t>
             </a:r>
           </a:p>
           <a:p>
             <a:r>
               <a:t>Format: Whole Class</a:t>
+            </a:r>
+          </a:p>
+          <a:p>
+            <a:pPr lvl="1"/>
+            <a:r>
+              <a:t>Format: Individual, hands-on</a:t>
+            </a:r>
+          </a:p>
+          <a:p>
+            <a:pPr lvl="1"/>
+            <a:r>
+              <a:t>Bloom’s: Create Delivery: Complete dashboard from…</a:t>
+            </a:r>
+          </a:p>
+          <a:p>
+            <a:pPr lvl="1"/>
+            <a:r>
+              <a:t>Minimum 4 visualizations, 1 filter, clear…</a:t>
+            </a:r>
+          </a:p>
+          <a:p>
+            <a:pPr lvl="1"/>
+            <a:r>
+              <a:t>Focus: clarity over complexity</a:t>
+            </a:r>
+          </a:p>
+          <a:p>
+            <a:pPr lvl="1"/>
+            <a:r>
+              <a:t>A simple dashboard answering a real…</a:t>
             </a:r>
           </a:p>
         </p:txBody>
@@ -4375,7 +4663,7 @@
           <a:lstStyle/>
           <a:p>
             <a:r>
-              <a:t>Activity: Dashboard Design Principles</a:t>
+              <a:t>Activity: Dashboard Gallery Walk + 5-Second Test  |✆</a:t>
             </a:r>
           </a:p>
         </p:txBody>
@@ -4396,42 +4684,12 @@
           <a:lstStyle/>
           <a:p>
             <a:r>
-              <a:t>Duration: 25 min</a:t>
+              <a:t>Duration: 20 min</a:t>
             </a:r>
           </a:p>
           <a:p>
             <a:r>
               <a:t>Format: Whole Class</a:t>
-            </a:r>
-          </a:p>
-          <a:p>
-            <a:pPr lvl="1"/>
-            <a:r>
-              <a:t>Format: Interactive lecture</a:t>
-            </a:r>
-          </a:p>
-          <a:p>
-            <a:pPr lvl="1"/>
-            <a:r>
-              <a:t>Bloom’s: Understand + Evaluate Delivery: The…</a:t>
-            </a:r>
-          </a:p>
-          <a:p>
-            <a:pPr lvl="1"/>
-            <a:r>
-              <a:t>Operational dashboards (daily monitoring) vs</a:t>
-            </a:r>
-          </a:p>
-          <a:p>
-            <a:pPr lvl="1"/>
-            <a:r>
-              <a:t>strategic dashboards (quarterly insight)</a:t>
-            </a:r>
-          </a:p>
-          <a:p>
-            <a:pPr lvl="1"/>
-            <a:r>
-              <a:t>Insert interaction at midpoint: students look…</a:t>
             </a:r>
           </a:p>
         </p:txBody>
